--- a/documentation/poster/poster.pptx
+++ b/documentation/poster/poster.pptx
@@ -107,7 +107,7 @@
   <p:extLst>
     <p:ext uri="{521415D9-36F7-43E2-AB2F-B90AF26B5E84}">
       <p14:sectionLst xmlns:p14="http://schemas.microsoft.com/office/powerpoint/2010/main">
-        <p14:section name="Poster" id="{5a66e598-e0dd-65ad-3e5b-c387b3a19538}">
+        <p14:section name="Poster" id="{a106e984-5878-a7fb-4dc3-a8885eb174e9}">
           <p14:sldIdLst>
             <p14:sldId id="256"/>
           </p14:sldIdLst>
@@ -1382,7 +1382,7 @@
       </p:sp>
       <p:pic>
         <p:nvPicPr>
-          <p:cNvPr id="9" name="icon-6" descr="users icon">    </p:cNvPr>
+          <p:cNvPr id="9" name="icon-6" descr="school icon">    </p:cNvPr>
           <p:cNvPicPr>
             <a:picLocks noChangeAspect="1"/>
           </p:cNvPicPr>
@@ -1418,8 +1418,8 @@
         </p:nvSpPr>
         <p:spPr>
           <a:xfrm>
-            <a:off x="1080000" y="5436000"/>
-            <a:ext cx="6192000" cy="936000"/>
+            <a:off x="1512000" y="5436000"/>
+            <a:ext cx="5616000" cy="936000"/>
           </a:xfrm>
           <a:prstGeom prst="rect">
             <a:avLst/>
@@ -1435,7 +1435,7 @@
               <a:buNone/>
             </a:pPr>
             <a:r>
-              <a:rPr lang="en-US" sz="6000" b="1" dirty="0">
+              <a:rPr lang="en-US" sz="5000" b="1" dirty="0">
                 <a:solidFill>
                   <a:schemeClr val="bg1"/>
                 </a:solidFill>
@@ -1443,9 +1443,9 @@
                 <a:ea typeface="Arial" pitchFamily="34" charset="-122"/>
                 <a:cs typeface="Arial" pitchFamily="34" charset="-120"/>
               </a:rPr>
-              <a:t>Open Day</a:t>
-            </a:r>
-            <a:endParaRPr lang="en-US" sz="6000" dirty="0"/>
+              <a:t>Future students</a:t>
+            </a:r>
+            <a:endParaRPr lang="en-US" sz="5000" dirty="0"/>
           </a:p>
         </p:txBody>
       </p:sp>
@@ -1479,7 +1479,7 @@
                   <a:schemeClr val="bg1"/>
                 </a:solidFill>
               </a:rPr>
-              <a:t>played live by visitors</a:t>
+              <a:t>a demo for prospective students</a:t>
             </a:r>
             <a:endParaRPr lang="en-US" sz="2600" dirty="0"/>
           </a:p>
@@ -1493,7 +1493,7 @@
                   <a:schemeClr val="accent2"/>
                 </a:solidFill>
               </a:rPr>
-              <a:t>on the stand's laptops</a:t>
+              <a:t>at the university's Open Days</a:t>
             </a:r>
             <a:endParaRPr lang="en-US" sz="2600" dirty="0"/>
           </a:p>
@@ -1530,7 +1530,7 @@
       </p:sp>
       <p:pic>
         <p:nvPicPr>
-          <p:cNvPr id="13" name="icon-10" descr="zap icon">    </p:cNvPr>
+          <p:cNvPr id="13" name="icon-10" descr="dices icon">    </p:cNvPr>
           <p:cNvPicPr>
             <a:picLocks noChangeAspect="1"/>
           </p:cNvPicPr>
@@ -1566,8 +1566,8 @@
         </p:nvSpPr>
         <p:spPr>
           <a:xfrm>
-            <a:off x="7704000" y="5436000"/>
-            <a:ext cx="6192000" cy="936000"/>
+            <a:off x="8136000" y="5436000"/>
+            <a:ext cx="5616000" cy="936000"/>
           </a:xfrm>
           <a:prstGeom prst="rect">
             <a:avLst/>
@@ -1583,7 +1583,7 @@
               <a:buNone/>
             </a:pPr>
             <a:r>
-              <a:rPr lang="en-US" sz="6000" b="1" dirty="0">
+              <a:rPr lang="en-US" sz="5000" b="1" dirty="0">
                 <a:solidFill>
                   <a:schemeClr val="bg1"/>
                 </a:solidFill>
@@ -1591,9 +1591,9 @@
                 <a:ea typeface="Arial" pitchFamily="34" charset="-122"/>
                 <a:cs typeface="Arial" pitchFamily="34" charset="-120"/>
               </a:rPr>
-              <a:t>Live play</a:t>
-            </a:r>
-            <a:endParaRPr lang="en-US" sz="6000" dirty="0"/>
+              <a:t>Scotland Yard</a:t>
+            </a:r>
+            <a:endParaRPr lang="en-US" sz="5000" dirty="0"/>
           </a:p>
         </p:txBody>
       </p:sp>
@@ -1627,7 +1627,7 @@
                   <a:schemeClr val="bg1"/>
                 </a:solidFill>
               </a:rPr>
-              <a:t>every move appears on</a:t>
+              <a:t>inspired by the classic board game</a:t>
             </a:r>
             <a:endParaRPr lang="en-US" sz="2600" dirty="0"/>
           </a:p>
@@ -1641,7 +1641,7 @@
                   <a:schemeClr val="accent2"/>
                 </a:solidFill>
               </a:rPr>
-              <a:t>every screen as it happens</a:t>
+              <a:t>by Ravensburger</a:t>
             </a:r>
             <a:endParaRPr lang="en-US" sz="2600" dirty="0"/>
           </a:p>
@@ -1714,8 +1714,8 @@
         </p:nvSpPr>
         <p:spPr>
           <a:xfrm>
-            <a:off x="14328000" y="5436000"/>
-            <a:ext cx="6192000" cy="936000"/>
+            <a:off x="14760000" y="5436000"/>
+            <a:ext cx="5616000" cy="936000"/>
           </a:xfrm>
           <a:prstGeom prst="rect">
             <a:avLst/>
@@ -1731,7 +1731,7 @@
               <a:buNone/>
             </a:pPr>
             <a:r>
-              <a:rPr lang="en-US" sz="6000" b="1" dirty="0">
+              <a:rPr lang="en-US" sz="5000" b="1" dirty="0">
                 <a:solidFill>
                   <a:schemeClr val="bg1"/>
                 </a:solidFill>
@@ -1741,7 +1741,7 @@
               </a:rPr>
               <a:t>No install</a:t>
             </a:r>
-            <a:endParaRPr lang="en-US" sz="6000" dirty="0"/>
+            <a:endParaRPr lang="en-US" sz="5000" dirty="0"/>
           </a:p>
         </p:txBody>
       </p:sp>
@@ -3993,7 +3993,7 @@
                   <a:schemeClr val="tx1"/>
                 </a:solidFill>
               </a:rPr>
-              <a:t>135 automated tests, including 300 random games. Every planted bug was caught.</a:t>
+              <a:t>The rules sit apart from the server, so each is tested exactly. 300 random games hunt for leaks.</a:t>
             </a:r>
             <a:endParaRPr lang="en-US" sz="2700" dirty="0"/>
           </a:p>
@@ -4008,7 +4008,7 @@
         <p:spPr>
           <a:xfrm>
             <a:off x="1080000" y="24228000"/>
-            <a:ext cx="11592000" cy="4464000"/>
+            <a:ext cx="7992000" cy="4464000"/>
           </a:xfrm>
           <a:prstGeom prst="roundRect">
             <a:avLst>
@@ -4087,7 +4087,7 @@
         <p:spPr>
           <a:xfrm>
             <a:off x="1908000" y="24336000"/>
-            <a:ext cx="10512000" cy="504000"/>
+            <a:ext cx="6912000" cy="504000"/>
           </a:xfrm>
           <a:prstGeom prst="rect">
             <a:avLst/>
@@ -4126,7 +4126,7 @@
         <p:spPr>
           <a:xfrm>
             <a:off x="1080000" y="24984000"/>
-            <a:ext cx="11592000" cy="0"/>
+            <a:ext cx="7992000" cy="0"/>
           </a:xfrm>
           <a:prstGeom prst="line">
             <a:avLst/>
@@ -4916,76 +4916,16 @@
           </a:p>
         </p:txBody>
       </p:sp>
-      <p:pic>
-        <p:nvPicPr>
-          <p:cNvPr id="107" name="board-mrx" descr="Mr X's screen during a game">    </p:cNvPr>
-          <p:cNvPicPr>
-            <a:picLocks noChangeAspect="1"/>
-          </p:cNvPicPr>
-          <p:nvPr/>
-        </p:nvPicPr>
-        <p:blipFill>
-          <a:blip r:embed="rId30"/>
-          <a:stretch>
-            <a:fillRect/>
-          </a:stretch>
-        </p:blipFill>
-        <p:spPr>
-          <a:xfrm>
-            <a:off x="8784000" y="25308000"/>
-            <a:ext cx="3600000" cy="2150000"/>
-          </a:xfrm>
-          <a:prstGeom prst="rect">
-            <a:avLst/>
-          </a:prstGeom>
-        </p:spPr>
-      </p:pic>
-      <p:sp>
-        <p:nvSpPr>
-          <p:cNvPr id="108" name="text-102"/>
-          <p:cNvSpPr txBox="1"/>
-          <p:nvPr/>
-        </p:nvSpPr>
-        <p:spPr>
-          <a:xfrm>
-            <a:off x="8784000" y="27530000"/>
-            <a:ext cx="3600000" cy="324000"/>
-          </a:xfrm>
-          <a:prstGeom prst="rect">
-            <a:avLst/>
-          </a:prstGeom>
-          <a:noFill/>
-          <a:ln/>
-        </p:spPr>
-        <p:txBody>
-          <a:bodyPr wrap="square" lIns="0" tIns="0" rIns="0" bIns="0" rtlCol="0" anchor="t"/>
-          <a:lstStyle/>
-          <a:p>
-            <a:pPr algn="ctr" indent="0" marL="0">
-              <a:buNone/>
-            </a:pPr>
-            <a:r>
-              <a:rPr lang="en-US" sz="2200" dirty="0">
-                <a:solidFill>
-                  <a:schemeClr val="tx2"/>
-                </a:solidFill>
-              </a:rPr>
-              <a:t>Mr X's screen in a live game</a:t>
-            </a:r>
-            <a:endParaRPr lang="en-US" sz="2200" dirty="0"/>
-          </a:p>
-        </p:txBody>
-      </p:sp>
-      <p:sp>
-        <p:nvSpPr>
-          <p:cNvPr id="109" name="shape-103"/>
-          <p:cNvSpPr/>
-          <p:nvPr/>
-        </p:nvSpPr>
-        <p:spPr>
-          <a:xfrm>
-            <a:off x="13104000" y="24228000"/>
-            <a:ext cx="7416000" cy="4464000"/>
+      <p:sp>
+        <p:nvSpPr>
+          <p:cNvPr id="107" name="shape-102"/>
+          <p:cNvSpPr/>
+          <p:nvPr/>
+        </p:nvSpPr>
+        <p:spPr>
+          <a:xfrm>
+            <a:off x="9504000" y="24228000"/>
+            <a:ext cx="11016000" cy="4464000"/>
           </a:xfrm>
           <a:prstGeom prst="roundRect">
             <a:avLst>
@@ -5000,13 +4940,13 @@
       </p:sp>
       <p:sp>
         <p:nvSpPr>
-          <p:cNvPr id="110" name="shape-104"/>
-          <p:cNvSpPr/>
-          <p:nvPr/>
-        </p:nvSpPr>
-        <p:spPr>
-          <a:xfrm>
-            <a:off x="13320000" y="24372000"/>
+          <p:cNvPr id="108" name="shape-103"/>
+          <p:cNvSpPr/>
+          <p:nvPr/>
+        </p:nvSpPr>
+        <p:spPr>
+          <a:xfrm>
+            <a:off x="9720000" y="24372000"/>
             <a:ext cx="468000" cy="468000"/>
           </a:xfrm>
           <a:prstGeom prst="roundRect">
@@ -5022,17 +4962,17 @@
       </p:sp>
       <p:pic>
         <p:nvPicPr>
-          <p:cNvPr id="111" name="icon-105" descr="flag icon">    </p:cNvPr>
+          <p:cNvPr id="109" name="icon-104" descr="clipboard check icon">    </p:cNvPr>
           <p:cNvPicPr>
             <a:picLocks noChangeAspect="1"/>
           </p:cNvPicPr>
           <p:nvPr/>
         </p:nvPicPr>
         <p:blipFill>
-          <a:blip r:embed="rId31">
+          <a:blip r:embed="rId30">
             <a:extLst>
               <a:ext uri="{96DAC541-7B7A-43D3-8B79-37D633B846F1}">
-                <asvg:svgBlip xmlns:asvg="http://schemas.microsoft.com/office/drawing/2016/SVG/main" r:embed="rId32"/>
+                <asvg:svgBlip xmlns:asvg="http://schemas.microsoft.com/office/drawing/2016/SVG/main" r:embed="rId31"/>
               </a:ext>
             </a:extLst>
           </a:blip>
@@ -5042,7 +4982,7 @@
         </p:blipFill>
         <p:spPr>
           <a:xfrm>
-            <a:off x="13410000" y="24462000"/>
+            <a:off x="9810000" y="24462000"/>
             <a:ext cx="288000" cy="288000"/>
           </a:xfrm>
           <a:prstGeom prst="rect">
@@ -5052,14 +4992,14 @@
       </p:pic>
       <p:sp>
         <p:nvSpPr>
-          <p:cNvPr id="112" name="text-106"/>
+          <p:cNvPr id="110" name="text-105"/>
           <p:cNvSpPr txBox="1"/>
           <p:nvPr/>
         </p:nvSpPr>
         <p:spPr>
           <a:xfrm>
-            <a:off x="13932000" y="24336000"/>
-            <a:ext cx="6336000" cy="504000"/>
+            <a:off x="10332000" y="24336000"/>
+            <a:ext cx="9936000" cy="504000"/>
           </a:xfrm>
           <a:prstGeom prst="rect">
             <a:avLst/>
@@ -5083,22 +5023,449 @@
                 <a:ea typeface="Arial" pitchFamily="34" charset="-122"/>
                 <a:cs typeface="Arial" pitchFamily="34" charset="-120"/>
               </a:rPr>
+              <a:t>EVALUATION &amp; OUTCOME</a:t>
+            </a:r>
+            <a:endParaRPr lang="en-US" sz="4000" dirty="0"/>
+          </a:p>
+        </p:txBody>
+      </p:sp>
+      <p:sp>
+        <p:nvSpPr>
+          <p:cNvPr id="111" name="shape-106"/>
+          <p:cNvSpPr/>
+          <p:nvPr/>
+        </p:nvSpPr>
+        <p:spPr>
+          <a:xfrm>
+            <a:off x="9792000" y="25092000"/>
+            <a:ext cx="2448000" cy="1440000"/>
+          </a:xfrm>
+          <a:prstGeom prst="roundRect">
+            <a:avLst>
+              <a:gd name="adj" fmla="val 7500"/>
+            </a:avLst>
+          </a:prstGeom>
+          <a:solidFill>
+            <a:schemeClr val="tx1"/>
+          </a:solidFill>
+          <a:ln/>
+        </p:spPr>
+      </p:sp>
+      <p:sp>
+        <p:nvSpPr>
+          <p:cNvPr id="112" name="text-107"/>
+          <p:cNvSpPr txBox="1"/>
+          <p:nvPr/>
+        </p:nvSpPr>
+        <p:spPr>
+          <a:xfrm>
+            <a:off x="9792000" y="25164000"/>
+            <a:ext cx="2448000" cy="612000"/>
+          </a:xfrm>
+          <a:prstGeom prst="rect">
+            <a:avLst/>
+          </a:prstGeom>
+          <a:noFill/>
+          <a:ln/>
+        </p:spPr>
+        <p:txBody>
+          <a:bodyPr wrap="square" lIns="0" tIns="0" rIns="0" bIns="0" rtlCol="0" anchor="ctr"/>
+          <a:lstStyle/>
+          <a:p>
+            <a:pPr algn="ctr" indent="0" marL="0">
+              <a:buNone/>
+            </a:pPr>
+            <a:r>
+              <a:rPr lang="en-US" sz="4800" b="1" dirty="0">
+                <a:solidFill>
+                  <a:srgbClr val="F59E0B"/>
+                </a:solidFill>
+                <a:latin typeface="Arial" pitchFamily="34" charset="0"/>
+                <a:ea typeface="Arial" pitchFamily="34" charset="-122"/>
+                <a:cs typeface="Arial" pitchFamily="34" charset="-120"/>
+              </a:rPr>
+              <a:t>135</a:t>
+            </a:r>
+            <a:endParaRPr lang="en-US" sz="4800" dirty="0"/>
+          </a:p>
+        </p:txBody>
+      </p:sp>
+      <p:sp>
+        <p:nvSpPr>
+          <p:cNvPr id="113" name="text-108"/>
+          <p:cNvSpPr txBox="1"/>
+          <p:nvPr/>
+        </p:nvSpPr>
+        <p:spPr>
+          <a:xfrm>
+            <a:off x="9900000" y="25812000"/>
+            <a:ext cx="2232000" cy="684000"/>
+          </a:xfrm>
+          <a:prstGeom prst="rect">
+            <a:avLst/>
+          </a:prstGeom>
+          <a:noFill/>
+          <a:ln/>
+        </p:spPr>
+        <p:txBody>
+          <a:bodyPr wrap="square" lIns="0" tIns="0" rIns="0" bIns="0" rtlCol="0" anchor="t"/>
+          <a:lstStyle/>
+          <a:p>
+            <a:pPr algn="ctr" indent="0" marL="0">
+              <a:buNone/>
+            </a:pPr>
+            <a:r>
+              <a:rPr lang="en-US" sz="2200" dirty="0">
+                <a:solidFill>
+                  <a:schemeClr val="bg1"/>
+                </a:solidFill>
+              </a:rPr>
+              <a:t>automated tests, all passing</a:t>
+            </a:r>
+            <a:endParaRPr lang="en-US" sz="2200" dirty="0"/>
+          </a:p>
+        </p:txBody>
+      </p:sp>
+      <p:sp>
+        <p:nvSpPr>
+          <p:cNvPr id="114" name="shape-109"/>
+          <p:cNvSpPr/>
+          <p:nvPr/>
+        </p:nvSpPr>
+        <p:spPr>
+          <a:xfrm>
+            <a:off x="12456000" y="25092000"/>
+            <a:ext cx="2448000" cy="1440000"/>
+          </a:xfrm>
+          <a:prstGeom prst="roundRect">
+            <a:avLst>
+              <a:gd name="adj" fmla="val 7500"/>
+            </a:avLst>
+          </a:prstGeom>
+          <a:solidFill>
+            <a:schemeClr val="tx1"/>
+          </a:solidFill>
+          <a:ln/>
+        </p:spPr>
+      </p:sp>
+      <p:sp>
+        <p:nvSpPr>
+          <p:cNvPr id="115" name="text-110"/>
+          <p:cNvSpPr txBox="1"/>
+          <p:nvPr/>
+        </p:nvSpPr>
+        <p:spPr>
+          <a:xfrm>
+            <a:off x="12456000" y="25164000"/>
+            <a:ext cx="2448000" cy="612000"/>
+          </a:xfrm>
+          <a:prstGeom prst="rect">
+            <a:avLst/>
+          </a:prstGeom>
+          <a:noFill/>
+          <a:ln/>
+        </p:spPr>
+        <p:txBody>
+          <a:bodyPr wrap="square" lIns="0" tIns="0" rIns="0" bIns="0" rtlCol="0" anchor="ctr"/>
+          <a:lstStyle/>
+          <a:p>
+            <a:pPr algn="ctr" indent="0" marL="0">
+              <a:buNone/>
+            </a:pPr>
+            <a:r>
+              <a:rPr lang="en-US" sz="4800" b="1" dirty="0">
+                <a:solidFill>
+                  <a:srgbClr val="F59E0B"/>
+                </a:solidFill>
+                <a:latin typeface="Arial" pitchFamily="34" charset="0"/>
+                <a:ea typeface="Arial" pitchFamily="34" charset="-122"/>
+                <a:cs typeface="Arial" pitchFamily="34" charset="-120"/>
+              </a:rPr>
+              <a:t>99.2%</a:t>
+            </a:r>
+            <a:endParaRPr lang="en-US" sz="4800" dirty="0"/>
+          </a:p>
+        </p:txBody>
+      </p:sp>
+      <p:sp>
+        <p:nvSpPr>
+          <p:cNvPr id="116" name="text-111"/>
+          <p:cNvSpPr txBox="1"/>
+          <p:nvPr/>
+        </p:nvSpPr>
+        <p:spPr>
+          <a:xfrm>
+            <a:off x="12564000" y="25812000"/>
+            <a:ext cx="2232000" cy="684000"/>
+          </a:xfrm>
+          <a:prstGeom prst="rect">
+            <a:avLst/>
+          </a:prstGeom>
+          <a:noFill/>
+          <a:ln/>
+        </p:spPr>
+        <p:txBody>
+          <a:bodyPr wrap="square" lIns="0" tIns="0" rIns="0" bIns="0" rtlCol="0" anchor="t"/>
+          <a:lstStyle/>
+          <a:p>
+            <a:pPr algn="ctr" indent="0" marL="0">
+              <a:buNone/>
+            </a:pPr>
+            <a:r>
+              <a:rPr lang="en-US" sz="2200" dirty="0">
+                <a:solidFill>
+                  <a:schemeClr val="bg1"/>
+                </a:solidFill>
+              </a:rPr>
+              <a:t>of server code lines covered</a:t>
+            </a:r>
+            <a:endParaRPr lang="en-US" sz="2200" dirty="0"/>
+          </a:p>
+        </p:txBody>
+      </p:sp>
+      <p:sp>
+        <p:nvSpPr>
+          <p:cNvPr id="117" name="shape-112"/>
+          <p:cNvSpPr/>
+          <p:nvPr/>
+        </p:nvSpPr>
+        <p:spPr>
+          <a:xfrm>
+            <a:off x="15120000" y="25092000"/>
+            <a:ext cx="2448000" cy="1440000"/>
+          </a:xfrm>
+          <a:prstGeom prst="roundRect">
+            <a:avLst>
+              <a:gd name="adj" fmla="val 7500"/>
+            </a:avLst>
+          </a:prstGeom>
+          <a:solidFill>
+            <a:schemeClr val="tx1"/>
+          </a:solidFill>
+          <a:ln/>
+        </p:spPr>
+      </p:sp>
+      <p:sp>
+        <p:nvSpPr>
+          <p:cNvPr id="118" name="text-113"/>
+          <p:cNvSpPr txBox="1"/>
+          <p:nvPr/>
+        </p:nvSpPr>
+        <p:spPr>
+          <a:xfrm>
+            <a:off x="15120000" y="25164000"/>
+            <a:ext cx="2448000" cy="612000"/>
+          </a:xfrm>
+          <a:prstGeom prst="rect">
+            <a:avLst/>
+          </a:prstGeom>
+          <a:noFill/>
+          <a:ln/>
+        </p:spPr>
+        <p:txBody>
+          <a:bodyPr wrap="square" lIns="0" tIns="0" rIns="0" bIns="0" rtlCol="0" anchor="ctr"/>
+          <a:lstStyle/>
+          <a:p>
+            <a:pPr algn="ctr" indent="0" marL="0">
+              <a:buNone/>
+            </a:pPr>
+            <a:r>
+              <a:rPr lang="en-US" sz="4800" b="1" dirty="0">
+                <a:solidFill>
+                  <a:srgbClr val="F59E0B"/>
+                </a:solidFill>
+                <a:latin typeface="Arial" pitchFamily="34" charset="0"/>
+                <a:ea typeface="Arial" pitchFamily="34" charset="-122"/>
+                <a:cs typeface="Arial" pitchFamily="34" charset="-120"/>
+              </a:rPr>
+              <a:t>100%</a:t>
+            </a:r>
+            <a:endParaRPr lang="en-US" sz="4800" dirty="0"/>
+          </a:p>
+        </p:txBody>
+      </p:sp>
+      <p:sp>
+        <p:nvSpPr>
+          <p:cNvPr id="119" name="text-114"/>
+          <p:cNvSpPr txBox="1"/>
+          <p:nvPr/>
+        </p:nvSpPr>
+        <p:spPr>
+          <a:xfrm>
+            <a:off x="15228000" y="25812000"/>
+            <a:ext cx="2232000" cy="684000"/>
+          </a:xfrm>
+          <a:prstGeom prst="rect">
+            <a:avLst/>
+          </a:prstGeom>
+          <a:noFill/>
+          <a:ln/>
+        </p:spPr>
+        <p:txBody>
+          <a:bodyPr wrap="square" lIns="0" tIns="0" rIns="0" bIns="0" rtlCol="0" anchor="t"/>
+          <a:lstStyle/>
+          <a:p>
+            <a:pPr algn="ctr" indent="0" marL="0">
+              <a:buNone/>
+            </a:pPr>
+            <a:r>
+              <a:rPr lang="en-US" sz="2200" dirty="0">
+                <a:solidFill>
+                  <a:schemeClr val="bg1"/>
+                </a:solidFill>
+              </a:rPr>
+              <a:t>of 199 planted bugs caught</a:t>
+            </a:r>
+            <a:endParaRPr lang="en-US" sz="2200" dirty="0"/>
+          </a:p>
+        </p:txBody>
+      </p:sp>
+      <p:sp>
+        <p:nvSpPr>
+          <p:cNvPr id="120" name="shape-115"/>
+          <p:cNvSpPr/>
+          <p:nvPr/>
+        </p:nvSpPr>
+        <p:spPr>
+          <a:xfrm>
+            <a:off x="17784000" y="25092000"/>
+            <a:ext cx="2448000" cy="1440000"/>
+          </a:xfrm>
+          <a:prstGeom prst="roundRect">
+            <a:avLst>
+              <a:gd name="adj" fmla="val 7500"/>
+            </a:avLst>
+          </a:prstGeom>
+          <a:solidFill>
+            <a:schemeClr val="tx1"/>
+          </a:solidFill>
+          <a:ln/>
+        </p:spPr>
+      </p:sp>
+      <p:sp>
+        <p:nvSpPr>
+          <p:cNvPr id="121" name="text-116"/>
+          <p:cNvSpPr txBox="1"/>
+          <p:nvPr/>
+        </p:nvSpPr>
+        <p:spPr>
+          <a:xfrm>
+            <a:off x="17784000" y="25164000"/>
+            <a:ext cx="2448000" cy="612000"/>
+          </a:xfrm>
+          <a:prstGeom prst="rect">
+            <a:avLst/>
+          </a:prstGeom>
+          <a:noFill/>
+          <a:ln/>
+        </p:spPr>
+        <p:txBody>
+          <a:bodyPr wrap="square" lIns="0" tIns="0" rIns="0" bIns="0" rtlCol="0" anchor="ctr"/>
+          <a:lstStyle/>
+          <a:p>
+            <a:pPr algn="ctr" indent="0" marL="0">
+              <a:buNone/>
+            </a:pPr>
+            <a:r>
+              <a:rPr lang="en-US" sz="4800" b="1" dirty="0">
+                <a:solidFill>
+                  <a:srgbClr val="F59E0B"/>
+                </a:solidFill>
+                <a:latin typeface="Arial" pitchFamily="34" charset="0"/>
+                <a:ea typeface="Arial" pitchFamily="34" charset="-122"/>
+                <a:cs typeface="Arial" pitchFamily="34" charset="-120"/>
+              </a:rPr>
+              <a:t>2</a:t>
+            </a:r>
+            <a:endParaRPr lang="en-US" sz="4800" dirty="0"/>
+          </a:p>
+        </p:txBody>
+      </p:sp>
+      <p:sp>
+        <p:nvSpPr>
+          <p:cNvPr id="122" name="text-117"/>
+          <p:cNvSpPr txBox="1"/>
+          <p:nvPr/>
+        </p:nvSpPr>
+        <p:spPr>
+          <a:xfrm>
+            <a:off x="17892000" y="25812000"/>
+            <a:ext cx="2232000" cy="684000"/>
+          </a:xfrm>
+          <a:prstGeom prst="rect">
+            <a:avLst/>
+          </a:prstGeom>
+          <a:noFill/>
+          <a:ln/>
+        </p:spPr>
+        <p:txBody>
+          <a:bodyPr wrap="square" lIns="0" tIns="0" rIns="0" bIns="0" rtlCol="0" anchor="t"/>
+          <a:lstStyle/>
+          <a:p>
+            <a:pPr algn="ctr" indent="0" marL="0">
+              <a:buNone/>
+            </a:pPr>
+            <a:r>
+              <a:rPr lang="en-US" sz="2200" dirty="0">
+                <a:solidFill>
+                  <a:schemeClr val="bg1"/>
+                </a:solidFill>
+              </a:rPr>
+              <a:t>rounds of user testing</a:t>
+            </a:r>
+            <a:endParaRPr lang="en-US" sz="2200" dirty="0"/>
+          </a:p>
+        </p:txBody>
+      </p:sp>
+      <p:sp>
+        <p:nvSpPr>
+          <p:cNvPr id="123" name="text-118"/>
+          <p:cNvSpPr txBox="1"/>
+          <p:nvPr/>
+        </p:nvSpPr>
+        <p:spPr>
+          <a:xfrm>
+            <a:off x="9792000" y="26748000"/>
+            <a:ext cx="5004000" cy="360000"/>
+          </a:xfrm>
+          <a:prstGeom prst="rect">
+            <a:avLst/>
+          </a:prstGeom>
+          <a:noFill/>
+          <a:ln/>
+        </p:spPr>
+        <p:txBody>
+          <a:bodyPr wrap="square" lIns="0" tIns="0" rIns="0" bIns="0" rtlCol="0" anchor="t"/>
+          <a:lstStyle/>
+          <a:p>
+            <a:pPr indent="0" marL="0">
+              <a:buNone/>
+            </a:pPr>
+            <a:r>
+              <a:rPr lang="en-US" sz="2600" b="1" spc="200" kern="0" dirty="0">
+                <a:solidFill>
+                  <a:schemeClr val="accent2"/>
+                </a:solidFill>
+                <a:latin typeface="Arial" pitchFamily="34" charset="0"/>
+                <a:ea typeface="Arial" pitchFamily="34" charset="-122"/>
+                <a:cs typeface="Arial" pitchFamily="34" charset="-120"/>
+              </a:rPr>
               <a:t>OUTCOME</a:t>
             </a:r>
-            <a:endParaRPr lang="en-US" sz="4000" dirty="0"/>
-          </a:p>
-        </p:txBody>
-      </p:sp>
-      <p:sp>
-        <p:nvSpPr>
-          <p:cNvPr id="113" name="text-107"/>
+            <a:endParaRPr lang="en-US" sz="2600" dirty="0"/>
+          </a:p>
+        </p:txBody>
+      </p:sp>
+      <p:sp>
+        <p:nvSpPr>
+          <p:cNvPr id="124" name="text-119"/>
           <p:cNvSpPr txBox="1"/>
           <p:nvPr/>
         </p:nvSpPr>
         <p:spPr>
           <a:xfrm>
-            <a:off x="13392000" y="25236000"/>
-            <a:ext cx="6840000" cy="1440000"/>
+            <a:off x="9792000" y="27180000"/>
+            <a:ext cx="5004000" cy="1368000"/>
           </a:xfrm>
           <a:prstGeom prst="rect">
             <a:avLst/>
@@ -5167,14 +5534,14 @@
       </p:sp>
       <p:sp>
         <p:nvSpPr>
-          <p:cNvPr id="114" name="text-108"/>
+          <p:cNvPr id="125" name="text-120"/>
           <p:cNvSpPr txBox="1"/>
           <p:nvPr/>
         </p:nvSpPr>
         <p:spPr>
           <a:xfrm>
-            <a:off x="13392000" y="26784000"/>
-            <a:ext cx="6840000" cy="360000"/>
+            <a:off x="15228000" y="26748000"/>
+            <a:ext cx="5004000" cy="360000"/>
           </a:xfrm>
           <a:prstGeom prst="rect">
             <a:avLst/>
@@ -5206,14 +5573,14 @@
       </p:sp>
       <p:sp>
         <p:nvSpPr>
-          <p:cNvPr id="115" name="text-109"/>
+          <p:cNvPr id="126" name="text-121"/>
           <p:cNvSpPr txBox="1"/>
           <p:nvPr/>
         </p:nvSpPr>
         <p:spPr>
           <a:xfrm>
-            <a:off x="13392000" y="27216000"/>
-            <a:ext cx="6840000" cy="1368000"/>
+            <a:off x="15228000" y="27180000"/>
+            <a:ext cx="5004000" cy="1368000"/>
           </a:xfrm>
           <a:prstGeom prst="rect">
             <a:avLst/>
